--- a/3 SECURITY RISKS OF C++ - Raamish Khan.pptx
+++ b/3 SECURITY RISKS OF C++ - Raamish Khan.pptx
@@ -905,7 +905,7 @@
           <a:p>
             <a:fld id="{D1D1EADE-8E88-4C7C-8AC5-FB148DE4940E}" type="datetime1">
               <a:rPr lang="en-US" smtClean="0"/>
-              <a:t>4/7/2026</a:t>
+              <a:t>4/9/2026</a:t>
             </a:fld>
             <a:endParaRPr lang="en-US"/>
           </a:p>
@@ -1156,7 +1156,7 @@
           <a:p>
             <a:fld id="{E31BA835-12AC-4E8F-955A-EA3F4DE2791F}" type="datetime1">
               <a:rPr lang="en-US" smtClean="0"/>
-              <a:t>4/7/2026</a:t>
+              <a:t>4/9/2026</a:t>
             </a:fld>
             <a:endParaRPr lang="en-US"/>
           </a:p>
@@ -1471,7 +1471,7 @@
           <a:p>
             <a:fld id="{E31BA835-12AC-4E8F-955A-EA3F4DE2791F}" type="datetime1">
               <a:rPr lang="en-US" smtClean="0"/>
-              <a:t>4/7/2026</a:t>
+              <a:t>4/9/2026</a:t>
             </a:fld>
             <a:endParaRPr lang="en-US"/>
           </a:p>
@@ -1813,7 +1813,7 @@
           <a:p>
             <a:fld id="{E31BA835-12AC-4E8F-955A-EA3F4DE2791F}" type="datetime1">
               <a:rPr lang="en-US" smtClean="0"/>
-              <a:t>4/7/2026</a:t>
+              <a:t>4/9/2026</a:t>
             </a:fld>
             <a:endParaRPr lang="en-US"/>
           </a:p>
@@ -2128,7 +2128,7 @@
           <a:p>
             <a:fld id="{E31BA835-12AC-4E8F-955A-EA3F4DE2791F}" type="datetime1">
               <a:rPr lang="en-US" smtClean="0"/>
-              <a:t>4/7/2026</a:t>
+              <a:t>4/9/2026</a:t>
             </a:fld>
             <a:endParaRPr lang="en-US"/>
           </a:p>
@@ -2522,7 +2522,7 @@
           <a:p>
             <a:fld id="{E31BA835-12AC-4E8F-955A-EA3F4DE2791F}" type="datetime1">
               <a:rPr lang="en-US" smtClean="0"/>
-              <a:t>4/7/2026</a:t>
+              <a:t>4/9/2026</a:t>
             </a:fld>
             <a:endParaRPr lang="en-US"/>
           </a:p>
@@ -2693,7 +2693,7 @@
           <a:p>
             <a:fld id="{E31BA835-12AC-4E8F-955A-EA3F4DE2791F}" type="datetime1">
               <a:rPr lang="en-US" smtClean="0"/>
-              <a:t>4/7/2026</a:t>
+              <a:t>4/9/2026</a:t>
             </a:fld>
             <a:endParaRPr lang="en-US"/>
           </a:p>
@@ -2874,7 +2874,7 @@
           <a:p>
             <a:fld id="{E31BA835-12AC-4E8F-955A-EA3F4DE2791F}" type="datetime1">
               <a:rPr lang="en-US" smtClean="0"/>
-              <a:t>4/7/2026</a:t>
+              <a:t>4/9/2026</a:t>
             </a:fld>
             <a:endParaRPr lang="en-US"/>
           </a:p>
@@ -3051,7 +3051,7 @@
           <a:p>
             <a:fld id="{E31BA835-12AC-4E8F-955A-EA3F4DE2791F}" type="datetime1">
               <a:rPr lang="en-US" smtClean="0"/>
-              <a:t>4/7/2026</a:t>
+              <a:t>4/9/2026</a:t>
             </a:fld>
             <a:endParaRPr lang="en-US"/>
           </a:p>
@@ -3299,7 +3299,7 @@
           <a:p>
             <a:fld id="{E31BA835-12AC-4E8F-955A-EA3F4DE2791F}" type="datetime1">
               <a:rPr lang="en-US" smtClean="0"/>
-              <a:t>4/7/2026</a:t>
+              <a:t>4/9/2026</a:t>
             </a:fld>
             <a:endParaRPr lang="en-US"/>
           </a:p>
@@ -3532,7 +3532,7 @@
           <a:p>
             <a:fld id="{E31BA835-12AC-4E8F-955A-EA3F4DE2791F}" type="datetime1">
               <a:rPr lang="en-US" smtClean="0"/>
-              <a:t>4/7/2026</a:t>
+              <a:t>4/9/2026</a:t>
             </a:fld>
             <a:endParaRPr lang="en-US"/>
           </a:p>
@@ -3907,7 +3907,7 @@
           <a:p>
             <a:fld id="{E31BA835-12AC-4E8F-955A-EA3F4DE2791F}" type="datetime1">
               <a:rPr lang="en-US" smtClean="0"/>
-              <a:t>4/7/2026</a:t>
+              <a:t>4/9/2026</a:t>
             </a:fld>
             <a:endParaRPr lang="en-US"/>
           </a:p>
@@ -4031,7 +4031,7 @@
           <a:p>
             <a:fld id="{E31BA835-12AC-4E8F-955A-EA3F4DE2791F}" type="datetime1">
               <a:rPr lang="en-US" smtClean="0"/>
-              <a:t>4/7/2026</a:t>
+              <a:t>4/9/2026</a:t>
             </a:fld>
             <a:endParaRPr lang="en-US"/>
           </a:p>
@@ -4127,7 +4127,7 @@
           <a:p>
             <a:fld id="{E31BA835-12AC-4E8F-955A-EA3F4DE2791F}" type="datetime1">
               <a:rPr lang="en-US" smtClean="0"/>
-              <a:t>4/7/2026</a:t>
+              <a:t>4/9/2026</a:t>
             </a:fld>
             <a:endParaRPr lang="en-US"/>
           </a:p>
@@ -4383,7 +4383,7 @@
           <a:p>
             <a:fld id="{E31BA835-12AC-4E8F-955A-EA3F4DE2791F}" type="datetime1">
               <a:rPr lang="en-US" smtClean="0"/>
-              <a:t>4/7/2026</a:t>
+              <a:t>4/9/2026</a:t>
             </a:fld>
             <a:endParaRPr lang="en-US"/>
           </a:p>
@@ -4647,7 +4647,7 @@
           <a:p>
             <a:fld id="{E31BA835-12AC-4E8F-955A-EA3F4DE2791F}" type="datetime1">
               <a:rPr lang="en-US" smtClean="0"/>
-              <a:t>4/7/2026</a:t>
+              <a:t>4/9/2026</a:t>
             </a:fld>
             <a:endParaRPr lang="en-US"/>
           </a:p>
@@ -5447,7 +5447,7 @@
           <a:p>
             <a:fld id="{E31BA835-12AC-4E8F-955A-EA3F4DE2791F}" type="datetime1">
               <a:rPr lang="en-US" smtClean="0"/>
-              <a:t>4/7/2026</a:t>
+              <a:t>4/9/2026</a:t>
             </a:fld>
             <a:endParaRPr lang="en-US"/>
           </a:p>
@@ -6175,7 +6175,13 @@
           <a:lstStyle/>
           <a:p>
             <a:r>
-              <a:rPr lang="en-US" sz="2600" dirty="0"/>
+              <a:rPr lang="en-US" sz="2600" dirty="0">
+                <a:solidFill>
+                  <a:schemeClr val="bg1">
+                    <a:lumMod val="65000"/>
+                  </a:schemeClr>
+                </a:solidFill>
+              </a:rPr>
               <a:t> Range Checking to protect against overflow or wrapping of the variable value</a:t>
             </a:r>
           </a:p>
@@ -6283,13 +6289,25 @@
           <a:lstStyle/>
           <a:p>
             <a:r>
-              <a:rPr lang="en-US" sz="2000" dirty="0"/>
+              <a:rPr lang="en-US" sz="2000" dirty="0">
+                <a:solidFill>
+                  <a:schemeClr val="bg1">
+                    <a:lumMod val="65000"/>
+                  </a:schemeClr>
+                </a:solidFill>
+              </a:rPr>
               <a:t>We can expose a lot of data using a pointer that’s not initialized as a pointer to a memory location or function</a:t>
             </a:r>
           </a:p>
           <a:p>
             <a:r>
-              <a:rPr lang="en-US" sz="2000" dirty="0"/>
+              <a:rPr lang="en-US" sz="2000" dirty="0">
+                <a:solidFill>
+                  <a:schemeClr val="bg1">
+                    <a:lumMod val="65000"/>
+                  </a:schemeClr>
+                </a:solidFill>
+              </a:rPr>
               <a:t>If the uninitialized pointer points to a memory location:</a:t>
             </a:r>
           </a:p>
@@ -6299,7 +6317,13 @@
               <a:buAutoNum type="romanLcPeriod"/>
             </a:pPr>
             <a:r>
-              <a:rPr lang="en-US" sz="2000" dirty="0"/>
+              <a:rPr lang="en-US" sz="2000" dirty="0">
+                <a:solidFill>
+                  <a:schemeClr val="bg1">
+                    <a:lumMod val="65000"/>
+                  </a:schemeClr>
+                </a:solidFill>
+              </a:rPr>
               <a:t>Cause the program to read or write to an unexpected memory location</a:t>
             </a:r>
           </a:p>
@@ -6309,21 +6333,39 @@
               <a:buAutoNum type="romanLcPeriod"/>
             </a:pPr>
             <a:r>
-              <a:rPr lang="en-US" sz="2000" dirty="0"/>
+              <a:rPr lang="en-US" sz="2000" dirty="0">
+                <a:solidFill>
+                  <a:schemeClr val="bg1">
+                    <a:lumMod val="65000"/>
+                  </a:schemeClr>
+                </a:solidFill>
+              </a:rPr>
               <a:t>If it points to a function, it can cause the unintentional execution of an arbitrary function </a:t>
             </a:r>
           </a:p>
           <a:p>
             <a:pPr marL="457200" indent="-400050"/>
             <a:r>
-              <a:rPr lang="en-US" sz="2000" dirty="0"/>
+              <a:rPr lang="en-US" sz="2000" dirty="0">
+                <a:solidFill>
+                  <a:schemeClr val="bg1">
+                    <a:lumMod val="65000"/>
+                  </a:schemeClr>
+                </a:solidFill>
+              </a:rPr>
               <a:t>Pointers are also vulnerable to null pointer dereferencing attacks, which can lead to program reliability issues</a:t>
             </a:r>
           </a:p>
           <a:p>
             <a:pPr marL="457200" indent="-400050"/>
             <a:r>
-              <a:rPr lang="en-US" sz="2000" dirty="0"/>
+              <a:rPr lang="en-US" sz="2000" dirty="0">
+                <a:solidFill>
+                  <a:schemeClr val="bg1">
+                    <a:lumMod val="65000"/>
+                  </a:schemeClr>
+                </a:solidFill>
+              </a:rPr>
               <a:t>An attacker can take advantage of this by enforcing a null pointer dereference:</a:t>
             </a:r>
           </a:p>
@@ -6333,7 +6375,13 @@
               <a:buAutoNum type="romanLcPeriod"/>
             </a:pPr>
             <a:r>
-              <a:rPr lang="en-US" sz="2000" dirty="0"/>
+              <a:rPr lang="en-US" sz="2000" dirty="0">
+                <a:solidFill>
+                  <a:schemeClr val="bg1">
+                    <a:lumMod val="65000"/>
+                  </a:schemeClr>
+                </a:solidFill>
+              </a:rPr>
               <a:t>Can bypass some security checks or reveal debugging information</a:t>
             </a:r>
           </a:p>
@@ -7327,7 +7375,7 @@
         </p:nvSpPr>
         <p:spPr>
           <a:xfrm>
-            <a:off x="846299" y="2369312"/>
+            <a:off x="935751" y="1781313"/>
             <a:ext cx="8596668" cy="2679768"/>
           </a:xfrm>
         </p:spPr>
@@ -7336,10 +7384,22 @@
           <a:lstStyle/>
           <a:p>
             <a:r>
-              <a:rPr lang="en-US" sz="2600" dirty="0"/>
+              <a:rPr lang="en-US" sz="2600" dirty="0">
+                <a:solidFill>
+                  <a:schemeClr val="bg1">
+                    <a:lumMod val="65000"/>
+                  </a:schemeClr>
+                </a:solidFill>
+              </a:rPr>
               <a:t>As we can see, the pointer is left uninitialized, which means that a random value is assigned to it, and the check will pass, as it may be a non-null value</a:t>
             </a:r>
-            <a:endParaRPr lang="en-US" dirty="0"/>
+            <a:endParaRPr lang="en-US" dirty="0">
+              <a:solidFill>
+                <a:schemeClr val="bg1">
+                  <a:lumMod val="65000"/>
+                </a:schemeClr>
+              </a:solidFill>
+            </a:endParaRPr>
           </a:p>
         </p:txBody>
       </p:sp>
@@ -7434,8 +7494,8 @@
         </p:nvSpPr>
         <p:spPr>
           <a:xfrm>
-            <a:off x="597821" y="1822659"/>
-            <a:ext cx="8596668" cy="3127028"/>
+            <a:off x="686312" y="2016040"/>
+            <a:ext cx="8596668" cy="1681317"/>
           </a:xfrm>
         </p:spPr>
         <p:txBody>
@@ -7445,19 +7505,25 @@
           <a:lstStyle/>
           <a:p>
             <a:r>
-              <a:rPr lang="en-US" sz="2600" dirty="0"/>
-              <a:t>Error Exception Handling to avoid pointer dereferencing attacks</a:t>
-            </a:r>
-          </a:p>
-          <a:p>
-            <a:r>
-              <a:rPr lang="en-US" sz="2600" dirty="0"/>
+              <a:rPr lang="en-US" sz="2600" dirty="0">
+                <a:solidFill>
+                  <a:schemeClr val="bg1">
+                    <a:lumMod val="65000"/>
+                  </a:schemeClr>
+                </a:solidFill>
+              </a:rPr>
               <a:t>Avoid using a Pointer and use references instead</a:t>
             </a:r>
           </a:p>
           <a:p>
             <a:r>
-              <a:rPr lang="en-US" sz="2600" dirty="0"/>
+              <a:rPr lang="en-US" sz="2600" dirty="0">
+                <a:solidFill>
+                  <a:schemeClr val="bg1">
+                    <a:lumMod val="65000"/>
+                  </a:schemeClr>
+                </a:solidFill>
+              </a:rPr>
               <a:t>Use smart pointers instead of raw pointers, if you really have to</a:t>
             </a:r>
           </a:p>
@@ -7560,19 +7626,37 @@
           <a:lstStyle/>
           <a:p>
             <a:r>
-              <a:rPr lang="en-US" sz="2600" dirty="0"/>
+              <a:rPr lang="en-US" sz="2600" dirty="0">
+                <a:solidFill>
+                  <a:schemeClr val="bg1">
+                    <a:lumMod val="65000"/>
+                  </a:schemeClr>
+                </a:solidFill>
+              </a:rPr>
               <a:t> C++ has a variety of vulnerabilities </a:t>
             </a:r>
           </a:p>
           <a:p>
             <a:r>
-              <a:rPr lang="en-US" sz="2600" dirty="0"/>
+              <a:rPr lang="en-US" sz="2600" dirty="0">
+                <a:solidFill>
+                  <a:schemeClr val="bg1">
+                    <a:lumMod val="65000"/>
+                  </a:schemeClr>
+                </a:solidFill>
+              </a:rPr>
               <a:t>Developers must be aware of when writing code</a:t>
             </a:r>
           </a:p>
           <a:p>
             <a:r>
-              <a:rPr lang="en-US" sz="2600" dirty="0"/>
+              <a:rPr lang="en-US" sz="2600" dirty="0">
+                <a:solidFill>
+                  <a:schemeClr val="bg1">
+                    <a:lumMod val="65000"/>
+                  </a:schemeClr>
+                </a:solidFill>
+              </a:rPr>
               <a:t>As developers, it’s our responsibility to implement security techniques</a:t>
             </a:r>
           </a:p>
@@ -7663,6 +7747,10 @@
           </p:nvPr>
         </p:nvSpPr>
         <p:spPr>
+          <a:xfrm>
+            <a:off x="836360" y="1832598"/>
+            <a:ext cx="8596668" cy="3880773"/>
+          </a:xfrm>
           <a:noFill/>
         </p:spPr>
         <p:txBody>
@@ -7672,9 +7760,32 @@
           <a:lstStyle/>
           <a:p>
             <a:r>
-              <a:rPr lang="en-US" sz="2600" dirty="0"/>
+              <a:rPr lang="en-US" sz="2600" dirty="0">
+                <a:solidFill>
+                  <a:schemeClr val="bg1">
+                    <a:lumMod val="65000"/>
+                  </a:schemeClr>
+                </a:solidFill>
+                <a:hlinkClick r:id="rId2"/>
+              </a:rPr>
               <a:t>https://github.com/raamishkhan99/cpp-security-risks.git</a:t>
             </a:r>
+            <a:endParaRPr lang="en-US" sz="2600" dirty="0">
+              <a:solidFill>
+                <a:schemeClr val="bg1">
+                  <a:lumMod val="65000"/>
+                </a:schemeClr>
+              </a:solidFill>
+            </a:endParaRPr>
+          </a:p>
+          <a:p>
+            <a:endParaRPr lang="en-US" sz="2600" dirty="0">
+              <a:solidFill>
+                <a:schemeClr val="bg1">
+                  <a:lumMod val="65000"/>
+                </a:schemeClr>
+              </a:solidFill>
+            </a:endParaRPr>
           </a:p>
         </p:txBody>
       </p:sp>
@@ -7780,7 +7891,13 @@
               <a:buChar char="Ø"/>
             </a:pPr>
             <a:r>
-              <a:rPr lang="en-US" sz="2800" dirty="0"/>
+              <a:rPr lang="en-US" sz="2800" dirty="0">
+                <a:solidFill>
+                  <a:schemeClr val="bg1">
+                    <a:lumMod val="65000"/>
+                  </a:schemeClr>
+                </a:solidFill>
+              </a:rPr>
               <a:t>Direct memory access</a:t>
             </a:r>
           </a:p>
@@ -7790,7 +7907,13 @@
               <a:buChar char="Ø"/>
             </a:pPr>
             <a:r>
-              <a:rPr lang="en-US" sz="2800" dirty="0"/>
+              <a:rPr lang="en-US" sz="2800" dirty="0">
+                <a:solidFill>
+                  <a:schemeClr val="bg1">
+                    <a:lumMod val="65000"/>
+                  </a:schemeClr>
+                </a:solidFill>
+              </a:rPr>
               <a:t>Widely used in critical systems</a:t>
             </a:r>
           </a:p>
@@ -7800,7 +7923,13 @@
               <a:buChar char="Ø"/>
             </a:pPr>
             <a:r>
-              <a:rPr lang="en-US" sz="2800" dirty="0"/>
+              <a:rPr lang="en-US" sz="2800" dirty="0">
+                <a:solidFill>
+                  <a:schemeClr val="bg1">
+                    <a:lumMod val="65000"/>
+                  </a:schemeClr>
+                </a:solidFill>
+              </a:rPr>
               <a:t>Secure software development</a:t>
             </a:r>
           </a:p>
@@ -7810,7 +7939,13 @@
               <a:buChar char="Ø"/>
             </a:pPr>
             <a:r>
-              <a:rPr lang="en-US" sz="2800" dirty="0"/>
+              <a:rPr lang="en-US" sz="2800" dirty="0">
+                <a:solidFill>
+                  <a:schemeClr val="bg1">
+                    <a:lumMod val="65000"/>
+                  </a:schemeClr>
+                </a:solidFill>
+              </a:rPr>
               <a:t>Security testing</a:t>
             </a:r>
           </a:p>
@@ -7819,7 +7954,13 @@
               <a:buFont typeface="Wingdings" panose="05000000000000000000" pitchFamily="2" charset="2"/>
               <a:buChar char="Ø"/>
             </a:pPr>
-            <a:endParaRPr lang="en-US" dirty="0"/>
+            <a:endParaRPr lang="en-US" dirty="0">
+              <a:solidFill>
+                <a:schemeClr val="bg1">
+                  <a:lumMod val="65000"/>
+                </a:schemeClr>
+              </a:solidFill>
+            </a:endParaRPr>
           </a:p>
         </p:txBody>
       </p:sp>
@@ -7915,39 +8056,75 @@
         </p:spPr>
         <p:txBody>
           <a:bodyPr>
-            <a:normAutofit fontScale="92500"/>
+            <a:normAutofit lnSpcReduction="10000"/>
           </a:bodyPr>
           <a:lstStyle/>
           <a:p>
             <a:r>
-              <a:rPr lang="en-US" sz="2800" dirty="0"/>
+              <a:rPr lang="en-US" sz="2800" dirty="0">
+                <a:solidFill>
+                  <a:schemeClr val="bg1">
+                    <a:lumMod val="65000"/>
+                  </a:schemeClr>
+                </a:solidFill>
+              </a:rPr>
               <a:t>One of the most common security concerns with C++</a:t>
             </a:r>
           </a:p>
           <a:p>
             <a:r>
-              <a:rPr lang="en-US" sz="2800" dirty="0"/>
+              <a:rPr lang="en-US" sz="2800" dirty="0">
+                <a:solidFill>
+                  <a:schemeClr val="bg1">
+                    <a:lumMod val="65000"/>
+                  </a:schemeClr>
+                </a:solidFill>
+              </a:rPr>
               <a:t>Ranked as </a:t>
             </a:r>
             <a:r>
-              <a:rPr lang="en-US" sz="3000" dirty="0"/>
+              <a:rPr lang="en-US" sz="3000" dirty="0">
+                <a:solidFill>
+                  <a:schemeClr val="bg1">
+                    <a:lumMod val="65000"/>
+                  </a:schemeClr>
+                </a:solidFill>
+              </a:rPr>
               <a:t>the</a:t>
             </a:r>
             <a:r>
-              <a:rPr lang="en-US" sz="2800" dirty="0"/>
+              <a:rPr lang="en-US" sz="2800" dirty="0">
+                <a:solidFill>
+                  <a:schemeClr val="bg1">
+                    <a:lumMod val="65000"/>
+                  </a:schemeClr>
+                </a:solidFill>
+              </a:rPr>
               <a:t> most dangerous software weakness </a:t>
             </a:r>
           </a:p>
           <a:p>
             <a:r>
-              <a:rPr lang="en-US" sz="2800" dirty="0"/>
-              <a:t>Caused by not having built-in boundary check features in C++, which reduces the risk of overwriting memory</a:t>
-            </a:r>
-          </a:p>
-          <a:p>
-            <a:r>
-              <a:rPr lang="en-US" sz="2800" dirty="0"/>
-              <a:t>Writing outside our allocated memory can cause program crashes and corrupt data</a:t>
+              <a:rPr lang="en-US" sz="2800" dirty="0">
+                <a:solidFill>
+                  <a:schemeClr val="bg1">
+                    <a:lumMod val="65000"/>
+                  </a:schemeClr>
+                </a:solidFill>
+              </a:rPr>
+              <a:t>Caused by not having built-in boundary check features in C++</a:t>
+            </a:r>
+          </a:p>
+          <a:p>
+            <a:r>
+              <a:rPr lang="en-US" sz="2800" dirty="0">
+                <a:solidFill>
+                  <a:schemeClr val="bg1">
+                    <a:lumMod val="65000"/>
+                  </a:schemeClr>
+                </a:solidFill>
+              </a:rPr>
+              <a:t>Writing outside our allocated memory can cause program crashes</a:t>
             </a:r>
           </a:p>
         </p:txBody>
@@ -9707,19 +9884,43 @@
           <a:lstStyle/>
           <a:p>
             <a:r>
-              <a:rPr lang="en-US" sz="2800" dirty="0"/>
+              <a:rPr lang="en-US" sz="2800" dirty="0">
+                <a:solidFill>
+                  <a:schemeClr val="bg1">
+                    <a:lumMod val="65000"/>
+                  </a:schemeClr>
+                </a:solidFill>
+              </a:rPr>
               <a:t>Vulnerable to a buffer overflow attack if the user enters a string longer than the length of the </a:t>
             </a:r>
             <a:r>
-              <a:rPr lang="en-US" sz="2800" dirty="0" err="1"/>
+              <a:rPr lang="en-US" sz="2800" dirty="0" err="1">
+                <a:solidFill>
+                  <a:schemeClr val="bg1">
+                    <a:lumMod val="65000"/>
+                  </a:schemeClr>
+                </a:solidFill>
+              </a:rPr>
               <a:t>user_input</a:t>
             </a:r>
             <a:r>
-              <a:rPr lang="en-US" sz="2800" dirty="0"/>
+              <a:rPr lang="en-US" sz="2800" dirty="0">
+                <a:solidFill>
+                  <a:schemeClr val="bg1">
+                    <a:lumMod val="65000"/>
+                  </a:schemeClr>
+                </a:solidFill>
+              </a:rPr>
               <a:t> array</a:t>
             </a:r>
             <a:r>
-              <a:rPr lang="en-US" sz="2600" dirty="0"/>
+              <a:rPr lang="en-US" sz="2600" dirty="0">
+                <a:solidFill>
+                  <a:schemeClr val="bg1">
+                    <a:lumMod val="65000"/>
+                  </a:schemeClr>
+                </a:solidFill>
+              </a:rPr>
               <a:t>. </a:t>
             </a:r>
           </a:p>
@@ -9824,19 +10025,37 @@
           <a:lstStyle/>
           <a:p>
             <a:r>
-              <a:rPr lang="en-US" sz="2600" dirty="0"/>
+              <a:rPr lang="en-US" sz="2600" dirty="0">
+                <a:solidFill>
+                  <a:schemeClr val="bg1">
+                    <a:lumMod val="65000"/>
+                  </a:schemeClr>
+                </a:solidFill>
+              </a:rPr>
               <a:t>Use stack canaries to secure data</a:t>
             </a:r>
           </a:p>
           <a:p>
             <a:r>
-              <a:rPr lang="en-US" sz="2600" dirty="0"/>
+              <a:rPr lang="en-US" sz="2600" dirty="0">
+                <a:solidFill>
+                  <a:schemeClr val="bg1">
+                    <a:lumMod val="65000"/>
+                  </a:schemeClr>
+                </a:solidFill>
+              </a:rPr>
               <a:t>Data Execution Prevention (DEP)</a:t>
             </a:r>
           </a:p>
           <a:p>
             <a:r>
-              <a:rPr lang="en-US" sz="2600" dirty="0"/>
+              <a:rPr lang="en-US" sz="2600" dirty="0">
+                <a:solidFill>
+                  <a:schemeClr val="bg1">
+                    <a:lumMod val="65000"/>
+                  </a:schemeClr>
+                </a:solidFill>
+              </a:rPr>
               <a:t>Good coding practices: </a:t>
             </a:r>
           </a:p>
@@ -9846,7 +10065,13 @@
               <a:buAutoNum type="romanLcPeriod"/>
             </a:pPr>
             <a:r>
-              <a:rPr lang="en-US" sz="2600" dirty="0"/>
+              <a:rPr lang="en-US" sz="2600" dirty="0">
+                <a:solidFill>
+                  <a:schemeClr val="bg1">
+                    <a:lumMod val="65000"/>
+                  </a:schemeClr>
+                </a:solidFill>
+              </a:rPr>
               <a:t>Bound Checking</a:t>
             </a:r>
           </a:p>
@@ -9856,31 +10081,73 @@
               <a:buAutoNum type="romanLcPeriod"/>
             </a:pPr>
             <a:r>
-              <a:rPr lang="en-US" sz="2600" dirty="0"/>
+              <a:rPr lang="en-US" sz="2600" dirty="0">
+                <a:solidFill>
+                  <a:schemeClr val="bg1">
+                    <a:lumMod val="65000"/>
+                  </a:schemeClr>
+                </a:solidFill>
+              </a:rPr>
               <a:t>Avoid standard library functions like </a:t>
             </a:r>
             <a:r>
-              <a:rPr lang="en-US" sz="2600" dirty="0" err="1"/>
+              <a:rPr lang="en-US" sz="2600" dirty="0" err="1">
+                <a:solidFill>
+                  <a:schemeClr val="bg1">
+                    <a:lumMod val="65000"/>
+                  </a:schemeClr>
+                </a:solidFill>
+              </a:rPr>
               <a:t>strcpy</a:t>
             </a:r>
             <a:r>
-              <a:rPr lang="en-US" sz="2600" dirty="0"/>
+              <a:rPr lang="en-US" sz="2600" dirty="0">
+                <a:solidFill>
+                  <a:schemeClr val="bg1">
+                    <a:lumMod val="65000"/>
+                  </a:schemeClr>
+                </a:solidFill>
+              </a:rPr>
               <a:t>, </a:t>
             </a:r>
             <a:r>
-              <a:rPr lang="en-US" sz="2600" dirty="0" err="1"/>
+              <a:rPr lang="en-US" sz="2600" dirty="0" err="1">
+                <a:solidFill>
+                  <a:schemeClr val="bg1">
+                    <a:lumMod val="65000"/>
+                  </a:schemeClr>
+                </a:solidFill>
+              </a:rPr>
               <a:t>scanf</a:t>
             </a:r>
             <a:r>
-              <a:rPr lang="en-US" sz="2600" dirty="0"/>
+              <a:rPr lang="en-US" sz="2600" dirty="0">
+                <a:solidFill>
+                  <a:schemeClr val="bg1">
+                    <a:lumMod val="65000"/>
+                  </a:schemeClr>
+                </a:solidFill>
+              </a:rPr>
               <a:t>, </a:t>
             </a:r>
             <a:r>
-              <a:rPr lang="en-US" sz="2600" dirty="0" err="1"/>
+              <a:rPr lang="en-US" sz="2600" dirty="0" err="1">
+                <a:solidFill>
+                  <a:schemeClr val="bg1">
+                    <a:lumMod val="65000"/>
+                  </a:schemeClr>
+                </a:solidFill>
+              </a:rPr>
               <a:t>printf</a:t>
             </a:r>
             <a:r>
-              <a:rPr lang="en-US" sz="2600" dirty="0"/>
+              <a:rPr lang="en-US" sz="2600" dirty="0">
+                <a:solidFill>
+                  <a:schemeClr val="bg1">
+                    <a:lumMod val="65000"/>
+                  </a:schemeClr>
+                </a:solidFill>
+              </a:rPr>
               <a:t>, and get</a:t>
             </a:r>
           </a:p>
@@ -9890,15 +10157,33 @@
               <a:buAutoNum type="romanLcPeriod"/>
             </a:pPr>
             <a:r>
-              <a:rPr lang="en-US" sz="2600" dirty="0"/>
+              <a:rPr lang="en-US" sz="2600" dirty="0">
+                <a:solidFill>
+                  <a:schemeClr val="bg1">
+                    <a:lumMod val="65000"/>
+                  </a:schemeClr>
+                </a:solidFill>
+              </a:rPr>
               <a:t>Replace them with equivalent secure functions, like </a:t>
             </a:r>
             <a:r>
-              <a:rPr lang="en-US" sz="2600" dirty="0" err="1"/>
+              <a:rPr lang="en-US" sz="2600" dirty="0" err="1">
+                <a:solidFill>
+                  <a:schemeClr val="bg1">
+                    <a:lumMod val="65000"/>
+                  </a:schemeClr>
+                </a:solidFill>
+              </a:rPr>
               <a:t>fgets</a:t>
             </a:r>
             <a:r>
-              <a:rPr lang="en-US" sz="2600" dirty="0"/>
+              <a:rPr lang="en-US" sz="2600" dirty="0">
+                <a:solidFill>
+                  <a:schemeClr val="bg1">
+                    <a:lumMod val="65000"/>
+                  </a:schemeClr>
+                </a:solidFill>
+              </a:rPr>
               <a:t>.</a:t>
             </a:r>
           </a:p>
@@ -10017,30 +10302,54 @@
         </p:spPr>
         <p:txBody>
           <a:bodyPr>
-            <a:normAutofit lnSpcReduction="10000"/>
+            <a:normAutofit/>
           </a:bodyPr>
           <a:lstStyle/>
           <a:p>
             <a:r>
-              <a:rPr lang="en-US" sz="2600" dirty="0"/>
+              <a:rPr lang="en-US" sz="2600" dirty="0">
+                <a:solidFill>
+                  <a:schemeClr val="bg1">
+                    <a:lumMod val="65000"/>
+                  </a:schemeClr>
+                </a:solidFill>
+              </a:rPr>
               <a:t>Integer overflow is when the value we’re trying to store in an integer variable exceeds the maximum value an integer can hold</a:t>
             </a:r>
           </a:p>
           <a:p>
             <a:r>
-              <a:rPr lang="en-US" sz="2600" dirty="0"/>
-              <a:t>Integer underflow occurs when this value is less than the minimum value an integer can hold. When it’s less, the value wraps around</a:t>
-            </a:r>
-          </a:p>
-          <a:p>
-            <a:r>
-              <a:rPr lang="en-US" sz="2600" dirty="0"/>
+              <a:rPr lang="en-US" sz="2600" dirty="0">
+                <a:solidFill>
+                  <a:schemeClr val="bg1">
+                    <a:lumMod val="65000"/>
+                  </a:schemeClr>
+                </a:solidFill>
+              </a:rPr>
+              <a:t>Integer underflow occurs when this value is less than the minimum value an integer can hold</a:t>
+            </a:r>
+          </a:p>
+          <a:p>
+            <a:r>
+              <a:rPr lang="en-US" sz="2600" dirty="0">
+                <a:solidFill>
+                  <a:schemeClr val="bg1">
+                    <a:lumMod val="65000"/>
+                  </a:schemeClr>
+                </a:solidFill>
+              </a:rPr>
               <a:t> 12th most dangerous software weakness</a:t>
             </a:r>
           </a:p>
           <a:p>
             <a:r>
-              <a:rPr lang="en-US" sz="2600" dirty="0"/>
+              <a:rPr lang="en-US" sz="2600" dirty="0">
+                <a:solidFill>
+                  <a:schemeClr val="bg1">
+                    <a:lumMod val="65000"/>
+                  </a:schemeClr>
+                </a:solidFill>
+              </a:rPr>
               <a:t> Integer overflow and underflow can lead to a buffer overflow vulnerability</a:t>
             </a:r>
           </a:p>
@@ -11045,51 +11354,117 @@
           <a:lstStyle/>
           <a:p>
             <a:r>
-              <a:rPr lang="en-US" sz="2600" dirty="0"/>
+              <a:rPr lang="en-US" sz="2600" dirty="0">
+                <a:solidFill>
+                  <a:schemeClr val="bg1">
+                    <a:lumMod val="65000"/>
+                  </a:schemeClr>
+                </a:solidFill>
+              </a:rPr>
               <a:t>This code represents an integer overflow vulnerability</a:t>
             </a:r>
           </a:p>
           <a:p>
             <a:r>
-              <a:rPr lang="en-US" sz="2600" dirty="0"/>
+              <a:rPr lang="en-US" sz="2600" dirty="0">
+                <a:solidFill>
+                  <a:schemeClr val="bg1">
+                    <a:lumMod val="65000"/>
+                  </a:schemeClr>
+                </a:solidFill>
+              </a:rPr>
               <a:t> While the code checks for a zero value, it’s possible to have a zero-memory allocation if the input </a:t>
             </a:r>
             <a:r>
-              <a:rPr lang="en-US" sz="2600" dirty="0" err="1"/>
+              <a:rPr lang="en-US" sz="2600" dirty="0" err="1">
+                <a:solidFill>
+                  <a:schemeClr val="bg1">
+                    <a:lumMod val="65000"/>
+                  </a:schemeClr>
+                </a:solidFill>
+              </a:rPr>
               <a:t>nresp</a:t>
             </a:r>
             <a:r>
-              <a:rPr lang="en-US" sz="2600" dirty="0"/>
+              <a:rPr lang="en-US" sz="2600" dirty="0">
+                <a:solidFill>
+                  <a:schemeClr val="bg1">
+                    <a:lumMod val="65000"/>
+                  </a:schemeClr>
+                </a:solidFill>
+              </a:rPr>
               <a:t> equals 1073741824</a:t>
             </a:r>
           </a:p>
           <a:p>
             <a:r>
-              <a:rPr lang="en-US" sz="2600" dirty="0"/>
+              <a:rPr lang="en-US" sz="2600" dirty="0">
+                <a:solidFill>
+                  <a:schemeClr val="bg1">
+                    <a:lumMod val="65000"/>
+                  </a:schemeClr>
+                </a:solidFill>
+              </a:rPr>
               <a:t>Multiplying this value with four (size of char pointer) causes the variable to overflow, and </a:t>
             </a:r>
             <a:r>
-              <a:rPr lang="en-US" sz="2600" dirty="0" err="1"/>
+              <a:rPr lang="en-US" sz="2600" dirty="0" err="1">
+                <a:solidFill>
+                  <a:schemeClr val="bg1">
+                    <a:lumMod val="65000"/>
+                  </a:schemeClr>
+                </a:solidFill>
+              </a:rPr>
               <a:t>xmalloc</a:t>
             </a:r>
             <a:r>
-              <a:rPr lang="en-US" sz="2600" dirty="0"/>
+              <a:rPr lang="en-US" sz="2600" dirty="0">
+                <a:solidFill>
+                  <a:schemeClr val="bg1">
+                    <a:lumMod val="65000"/>
+                  </a:schemeClr>
+                </a:solidFill>
+              </a:rPr>
               <a:t>(</a:t>
             </a:r>
             <a:r>
-              <a:rPr lang="en-US" sz="2600" dirty="0" err="1"/>
+              <a:rPr lang="en-US" sz="2600" dirty="0" err="1">
+                <a:solidFill>
+                  <a:schemeClr val="bg1">
+                    <a:lumMod val="65000"/>
+                  </a:schemeClr>
+                </a:solidFill>
+              </a:rPr>
               <a:t>nresp</a:t>
             </a:r>
             <a:r>
-              <a:rPr lang="en-US" sz="2600" dirty="0"/>
+              <a:rPr lang="en-US" sz="2600" dirty="0">
+                <a:solidFill>
+                  <a:schemeClr val="bg1">
+                    <a:lumMod val="65000"/>
+                  </a:schemeClr>
+                </a:solidFill>
+              </a:rPr>
               <a:t>*</a:t>
             </a:r>
             <a:r>
-              <a:rPr lang="en-US" sz="2600" dirty="0" err="1"/>
+              <a:rPr lang="en-US" sz="2600" dirty="0" err="1">
+                <a:solidFill>
+                  <a:schemeClr val="bg1">
+                    <a:lumMod val="65000"/>
+                  </a:schemeClr>
+                </a:solidFill>
+              </a:rPr>
               <a:t>sizeof</a:t>
             </a:r>
             <a:r>
-              <a:rPr lang="en-US" sz="2600" dirty="0"/>
+              <a:rPr lang="en-US" sz="2600" dirty="0">
+                <a:solidFill>
+                  <a:schemeClr val="bg1">
+                    <a:lumMod val="65000"/>
+                  </a:schemeClr>
+                </a:solidFill>
+              </a:rPr>
               <a:t>(char*)) allocates a buffer of size 0</a:t>
             </a:r>
           </a:p>
